--- a/20260930_サンクスLINEのご提案（簡易版）ver1.2.pptx
+++ b/20260930_サンクスLINEのご提案（簡易版）ver1.2.pptx
@@ -4011,7 +4011,7 @@
         </p:nvSpPr>
         <p:spPr>
           <a:xfrm>
-            <a:off x="432000" y="2485800"/>
+            <a:off x="432000" y="2755799"/>
             <a:ext cx="1584000" cy="936000"/>
           </a:xfrm>
           <a:prstGeom prst="roundRect">
@@ -4074,7 +4074,7 @@
         </p:nvSpPr>
         <p:spPr>
           <a:xfrm>
-            <a:off x="2088000" y="2791800"/>
+            <a:off x="2088000" y="3061799"/>
             <a:ext cx="288000" cy="324000"/>
           </a:xfrm>
           <a:prstGeom prst="rightArrow">
@@ -4119,7 +4119,7 @@
         </p:nvSpPr>
         <p:spPr>
           <a:xfrm>
-            <a:off x="2448000" y="2485800"/>
+            <a:off x="2448000" y="2755799"/>
             <a:ext cx="1764000" cy="936000"/>
           </a:xfrm>
           <a:prstGeom prst="roundRect">
@@ -4200,7 +4200,7 @@
         </p:nvSpPr>
         <p:spPr>
           <a:xfrm>
-            <a:off x="4284000" y="2791800"/>
+            <a:off x="4284000" y="3061799"/>
             <a:ext cx="288000" cy="324000"/>
           </a:xfrm>
           <a:prstGeom prst="rightArrow">
@@ -4245,7 +4245,7 @@
         </p:nvSpPr>
         <p:spPr>
           <a:xfrm>
-            <a:off x="4644000" y="2485800"/>
+            <a:off x="4644000" y="2755799"/>
             <a:ext cx="1296000" cy="936000"/>
           </a:xfrm>
           <a:prstGeom prst="roundRect">
@@ -4340,7 +4340,7 @@
         </p:nvSpPr>
         <p:spPr>
           <a:xfrm>
-            <a:off x="6012000" y="2791800"/>
+            <a:off x="6012000" y="3061799"/>
             <a:ext cx="288000" cy="324000"/>
           </a:xfrm>
           <a:prstGeom prst="rightArrow">
@@ -4385,7 +4385,7 @@
         </p:nvSpPr>
         <p:spPr>
           <a:xfrm>
-            <a:off x="6372000" y="2485800"/>
+            <a:off x="6372000" y="2755799"/>
             <a:ext cx="3103199" cy="432000"/>
           </a:xfrm>
           <a:prstGeom prst="roundRect">
@@ -4448,7 +4448,7 @@
         </p:nvSpPr>
         <p:spPr>
           <a:xfrm>
-            <a:off x="6372000" y="2989801"/>
+            <a:off x="6372000" y="3259800"/>
             <a:ext cx="3103199" cy="432000"/>
           </a:xfrm>
           <a:prstGeom prst="roundRect">
@@ -4511,7 +4511,7 @@
         </p:nvSpPr>
         <p:spPr>
           <a:xfrm>
-            <a:off x="432000" y="3709801"/>
+            <a:off x="432000" y="3979800"/>
             <a:ext cx="2951999" cy="936000"/>
           </a:xfrm>
           <a:prstGeom prst="roundRect">
@@ -4620,7 +4620,7 @@
         </p:nvSpPr>
         <p:spPr>
           <a:xfrm>
-            <a:off x="3477599" y="3709801"/>
+            <a:off x="3477599" y="3979800"/>
             <a:ext cx="2951999" cy="936000"/>
           </a:xfrm>
           <a:prstGeom prst="roundRect">
@@ -4769,7 +4769,7 @@
         </p:nvSpPr>
         <p:spPr>
           <a:xfrm>
-            <a:off x="6523199" y="3709801"/>
+            <a:off x="6523199" y="3979800"/>
             <a:ext cx="2951999" cy="936000"/>
           </a:xfrm>
           <a:prstGeom prst="roundRect">
@@ -4858,310 +4858,6 @@
                 <a:cs typeface="メイリオ"/>
               </a:rPr>
               <a:t>有効</a:t>
-            </a:r>
-            <a:endParaRPr sz="1050" dirty="0">
-              <a:solidFill>
-                <a:srgbClr val="333333"/>
-              </a:solidFill>
-              <a:latin typeface="メイリオ"/>
-              <a:ea typeface="メイリオ"/>
-              <a:cs typeface="メイリオ"/>
-            </a:endParaRPr>
-          </a:p>
-        </p:txBody>
-      </p:sp>
-      <p:sp>
-        <p:nvSpPr>
-          <p:cNvPr id="16" name="Rounded Rectangle 15"/>
-          <p:cNvSpPr/>
-          <p:nvPr/>
-        </p:nvSpPr>
-        <p:spPr>
-          <a:xfrm>
-            <a:off x="1425600" y="4896000"/>
-            <a:ext cx="7056000" cy="432000"/>
-          </a:xfrm>
-          <a:prstGeom prst="roundRect">
-            <a:avLst>
-              <a:gd name="adj" fmla="val 6000"/>
-            </a:avLst>
-          </a:prstGeom>
-          <a:solidFill>
-            <a:srgbClr val="FFFFFF"/>
-          </a:solidFill>
-          <a:ln w="12700">
-            <a:solidFill>
-              <a:srgbClr val="D9D9D9"/>
-            </a:solidFill>
-          </a:ln>
-          <a:effectLst/>
-        </p:spPr>
-        <p:style>
-          <a:lnRef idx="1">
-            <a:schemeClr val="accent1"/>
-          </a:lnRef>
-          <a:fillRef idx="3">
-            <a:schemeClr val="accent1"/>
-          </a:fillRef>
-          <a:effectRef idx="2">
-            <a:schemeClr val="accent1"/>
-          </a:effectRef>
-          <a:fontRef idx="minor">
-            <a:schemeClr val="lt1"/>
-          </a:fontRef>
-        </p:style>
-        <p:txBody>
-          <a:bodyPr rtlCol="0" anchor="ctr"/>
-          <a:lstStyle/>
-          <a:p>
-            <a:pPr algn="ctr"/>
-            <a:endParaRPr sz="2400"/>
-          </a:p>
-        </p:txBody>
-      </p:sp>
-      <p:sp>
-        <p:nvSpPr>
-          <p:cNvPr id="17" name="Rounded Rectangle 16"/>
-          <p:cNvSpPr/>
-          <p:nvPr/>
-        </p:nvSpPr>
-        <p:spPr>
-          <a:xfrm>
-            <a:off x="1533600" y="4986000"/>
-            <a:ext cx="648000" cy="251999"/>
-          </a:xfrm>
-          <a:prstGeom prst="roundRect">
-            <a:avLst>
-              <a:gd name="adj" fmla="val 18000"/>
-            </a:avLst>
-          </a:prstGeom>
-          <a:solidFill>
-            <a:srgbClr val="1F285A"/>
-          </a:solidFill>
-          <a:ln>
-            <a:noFill/>
-          </a:ln>
-          <a:effectLst/>
-        </p:spPr>
-        <p:style>
-          <a:lnRef idx="1">
-            <a:schemeClr val="accent1"/>
-          </a:lnRef>
-          <a:fillRef idx="3">
-            <a:schemeClr val="accent1"/>
-          </a:fillRef>
-          <a:effectRef idx="2">
-            <a:schemeClr val="accent1"/>
-          </a:effectRef>
-          <a:fontRef idx="minor">
-            <a:schemeClr val="lt1"/>
-          </a:fontRef>
-        </p:style>
-        <p:txBody>
-          <a:bodyPr wrap="square" lIns="36000" tIns="0" rIns="36000" bIns="0" rtlCol="0" anchor="ctr"/>
-          <a:lstStyle/>
-          <a:p>
-            <a:pPr algn="ctr"/>
-            <a:r>
-              <a:rPr sz="1400" b="1">
-                <a:solidFill>
-                  <a:srgbClr val="FFFFFF"/>
-                </a:solidFill>
-                <a:latin typeface="メイリオ"/>
-                <a:ea typeface="メイリオ"/>
-                <a:cs typeface="メイリオ"/>
-              </a:rPr>
-              <a:t>費用</a:t>
-            </a:r>
-          </a:p>
-        </p:txBody>
-      </p:sp>
-      <p:sp>
-        <p:nvSpPr>
-          <p:cNvPr id="18" name="TextBox 17"/>
-          <p:cNvSpPr txBox="1"/>
-          <p:nvPr/>
-        </p:nvSpPr>
-        <p:spPr>
-          <a:xfrm>
-            <a:off x="2253600" y="4951689"/>
-            <a:ext cx="2520000" cy="320621"/>
-          </a:xfrm>
-          <a:prstGeom prst="rect">
-            <a:avLst/>
-          </a:prstGeom>
-          <a:noFill/>
-        </p:spPr>
-        <p:txBody>
-          <a:bodyPr wrap="square" lIns="0" tIns="21600" rIns="50400" bIns="21600" anchor="ctr">
-            <a:spAutoFit/>
-          </a:bodyPr>
-          <a:lstStyle/>
-          <a:p>
-            <a:pPr algn="l"/>
-            <a:r>
-              <a:rPr sz="1200" b="1">
-                <a:solidFill>
-                  <a:srgbClr val="333333"/>
-                </a:solidFill>
-                <a:latin typeface="メイリオ"/>
-                <a:ea typeface="メイリオ"/>
-                <a:cs typeface="メイリオ"/>
-              </a:rPr>
-              <a:t>初期 </a:t>
-            </a:r>
-            <a:r>
-              <a:rPr b="1">
-                <a:solidFill>
-                  <a:srgbClr val="1F285A"/>
-                </a:solidFill>
-                <a:latin typeface="メイリオ"/>
-                <a:ea typeface="メイリオ"/>
-                <a:cs typeface="メイリオ"/>
-              </a:rPr>
-              <a:t>10万円</a:t>
-            </a:r>
-            <a:r>
-              <a:rPr sz="1200" b="1">
-                <a:solidFill>
-                  <a:srgbClr val="333333"/>
-                </a:solidFill>
-                <a:latin typeface="メイリオ"/>
-                <a:ea typeface="メイリオ"/>
-                <a:cs typeface="メイリオ"/>
-              </a:rPr>
-              <a:t>　月額 </a:t>
-            </a:r>
-            <a:r>
-              <a:rPr b="1">
-                <a:solidFill>
-                  <a:srgbClr val="1F285A"/>
-                </a:solidFill>
-                <a:latin typeface="メイリオ"/>
-                <a:ea typeface="メイリオ"/>
-                <a:cs typeface="メイリオ"/>
-              </a:rPr>
-              <a:t>3万円〜</a:t>
-            </a:r>
-          </a:p>
-        </p:txBody>
-      </p:sp>
-      <p:cxnSp>
-        <p:nvCxnSpPr>
-          <p:cNvPr id="19" name="Connector 18"/>
-          <p:cNvCxnSpPr/>
-          <p:nvPr/>
-        </p:nvCxnSpPr>
-        <p:spPr>
-          <a:xfrm>
-            <a:off x="4845600" y="4986000"/>
-            <a:ext cx="0" cy="252000"/>
-          </a:xfrm>
-          <a:prstGeom prst="line">
-            <a:avLst/>
-          </a:prstGeom>
-          <a:ln w="12700">
-            <a:solidFill>
-              <a:srgbClr val="D9D9D9"/>
-            </a:solidFill>
-          </a:ln>
-        </p:spPr>
-        <p:style>
-          <a:lnRef idx="2">
-            <a:schemeClr val="accent1"/>
-          </a:lnRef>
-          <a:fillRef idx="0">
-            <a:schemeClr val="accent1"/>
-          </a:fillRef>
-          <a:effectRef idx="1">
-            <a:schemeClr val="accent1"/>
-          </a:effectRef>
-          <a:fontRef idx="minor">
-            <a:schemeClr val="tx1"/>
-          </a:fontRef>
-        </p:style>
-      </p:cxnSp>
-      <p:sp>
-        <p:nvSpPr>
-          <p:cNvPr id="20" name="TextBox 19"/>
-          <p:cNvSpPr txBox="1"/>
-          <p:nvPr/>
-        </p:nvSpPr>
-        <p:spPr>
-          <a:xfrm>
-            <a:off x="4953600" y="4922195"/>
-            <a:ext cx="3491999" cy="379611"/>
-          </a:xfrm>
-          <a:prstGeom prst="rect">
-            <a:avLst/>
-          </a:prstGeom>
-          <a:noFill/>
-        </p:spPr>
-        <p:txBody>
-          <a:bodyPr wrap="square" lIns="0" tIns="21600" rIns="50400" bIns="21600" anchor="ctr">
-            <a:spAutoFit/>
-          </a:bodyPr>
-          <a:lstStyle/>
-          <a:p>
-            <a:pPr algn="l">
-              <a:spcAft>
-                <a:spcPts val="100"/>
-              </a:spcAft>
-            </a:pPr>
-            <a:r>
-              <a:rPr sz="1050" dirty="0">
-                <a:solidFill>
-                  <a:srgbClr val="333333"/>
-                </a:solidFill>
-                <a:latin typeface="メイリオ"/>
-                <a:ea typeface="メイリオ"/>
-                <a:cs typeface="メイリオ"/>
-              </a:rPr>
-              <a:t> </a:t>
-            </a:r>
-            <a:r>
-              <a:rPr sz="1050" dirty="0" err="1">
-                <a:solidFill>
-                  <a:srgbClr val="333333"/>
-                </a:solidFill>
-                <a:latin typeface="メイリオ"/>
-                <a:ea typeface="メイリオ"/>
-                <a:cs typeface="メイリオ"/>
-              </a:rPr>
-              <a:t>今お使いのAPIツール（Lステップ等）と併用できます</a:t>
-            </a:r>
-            <a:endParaRPr sz="1050" dirty="0">
-              <a:solidFill>
-                <a:srgbClr val="333333"/>
-              </a:solidFill>
-              <a:latin typeface="メイリオ"/>
-              <a:ea typeface="メイリオ"/>
-              <a:cs typeface="メイリオ"/>
-            </a:endParaRPr>
-          </a:p>
-          <a:p>
-            <a:pPr algn="l"/>
-            <a:r>
-              <a:rPr sz="1050" dirty="0">
-                <a:solidFill>
-                  <a:srgbClr val="333333"/>
-                </a:solidFill>
-                <a:latin typeface="メイリオ"/>
-                <a:ea typeface="メイリオ"/>
-                <a:cs typeface="メイリオ"/>
-              </a:rPr>
-              <a:t> </a:t>
-            </a:r>
-            <a:r>
-              <a:rPr sz="1050" dirty="0" err="1">
-                <a:solidFill>
-                  <a:srgbClr val="333333"/>
-                </a:solidFill>
-                <a:latin typeface="メイリオ"/>
-                <a:ea typeface="メイリオ"/>
-                <a:cs typeface="メイリオ"/>
-              </a:rPr>
-              <a:t>案内を置く完了画面を増やす場合は、追加費用</a:t>
             </a:r>
             <a:endParaRPr sz="1050" dirty="0">
               <a:solidFill>
@@ -7593,7 +7289,7 @@
         </p:nvSpPr>
         <p:spPr>
           <a:xfrm>
-            <a:off x="432000" y="2448900"/>
+            <a:off x="432000" y="2143800"/>
             <a:ext cx="864000" cy="864000"/>
           </a:xfrm>
           <a:prstGeom prst="roundRect">
@@ -7654,7 +7350,7 @@
         </p:nvSpPr>
         <p:spPr>
           <a:xfrm>
-            <a:off x="1404000" y="2448900"/>
+            <a:off x="1404000" y="2143800"/>
             <a:ext cx="8071200" cy="864000"/>
           </a:xfrm>
           <a:prstGeom prst="roundRect">
@@ -7736,7 +7432,7 @@
         </p:nvSpPr>
         <p:spPr>
           <a:xfrm>
-            <a:off x="432000" y="3528900"/>
+            <a:off x="432000" y="3223800"/>
             <a:ext cx="864000" cy="864000"/>
           </a:xfrm>
           <a:prstGeom prst="roundRect">
@@ -7797,7 +7493,7 @@
         </p:nvSpPr>
         <p:spPr>
           <a:xfrm>
-            <a:off x="1404000" y="3528900"/>
+            <a:off x="1404000" y="3223800"/>
             <a:ext cx="8071200" cy="864000"/>
           </a:xfrm>
           <a:prstGeom prst="roundRect">
@@ -7873,13 +7569,164 @@
       </p:sp>
       <p:sp>
         <p:nvSpPr>
+          <p:cNvPr id="9" name="Rounded Rectangle 8"/>
+          <p:cNvSpPr/>
+          <p:nvPr/>
+        </p:nvSpPr>
+        <p:spPr>
+          <a:xfrm>
+            <a:off x="432000" y="4411800"/>
+            <a:ext cx="1655999" cy="324000"/>
+          </a:xfrm>
+          <a:prstGeom prst="roundRect">
+            <a:avLst>
+              <a:gd name="adj" fmla="val 18000"/>
+            </a:avLst>
+          </a:prstGeom>
+          <a:solidFill>
+            <a:srgbClr val="1F285A"/>
+          </a:solidFill>
+          <a:ln>
+            <a:noFill/>
+          </a:ln>
+          <a:effectLst/>
+        </p:spPr>
+        <p:style>
+          <a:lnRef idx="1">
+            <a:schemeClr val="accent1"/>
+          </a:lnRef>
+          <a:fillRef idx="3">
+            <a:schemeClr val="accent1"/>
+          </a:fillRef>
+          <a:effectRef idx="2">
+            <a:schemeClr val="accent1"/>
+          </a:effectRef>
+          <a:fontRef idx="minor">
+            <a:schemeClr val="lt1"/>
+          </a:fontRef>
+        </p:style>
+        <p:txBody>
+          <a:bodyPr wrap="square" lIns="36000" tIns="0" rIns="36000" bIns="0" rtlCol="0" anchor="ctr"/>
+          <a:lstStyle/>
+          <a:p>
+            <a:pPr algn="ctr"/>
+            <a:r>
+              <a:rPr sz="1300" b="1">
+                <a:solidFill>
+                  <a:srgbClr val="FFFFFF"/>
+                </a:solidFill>
+                <a:latin typeface="メイリオ"/>
+                <a:ea typeface="メイリオ"/>
+                <a:cs typeface="メイリオ"/>
+              </a:rPr>
+              <a:t>初期 10万円</a:t>
+            </a:r>
+          </a:p>
+        </p:txBody>
+      </p:sp>
+      <p:sp>
+        <p:nvSpPr>
+          <p:cNvPr id="10" name="Rounded Rectangle 9"/>
+          <p:cNvSpPr/>
+          <p:nvPr/>
+        </p:nvSpPr>
+        <p:spPr>
+          <a:xfrm>
+            <a:off x="2160000" y="4411800"/>
+            <a:ext cx="1655999" cy="324000"/>
+          </a:xfrm>
+          <a:prstGeom prst="roundRect">
+            <a:avLst>
+              <a:gd name="adj" fmla="val 18000"/>
+            </a:avLst>
+          </a:prstGeom>
+          <a:solidFill>
+            <a:srgbClr val="1F285A"/>
+          </a:solidFill>
+          <a:ln>
+            <a:noFill/>
+          </a:ln>
+          <a:effectLst/>
+        </p:spPr>
+        <p:style>
+          <a:lnRef idx="1">
+            <a:schemeClr val="accent1"/>
+          </a:lnRef>
+          <a:fillRef idx="3">
+            <a:schemeClr val="accent1"/>
+          </a:fillRef>
+          <a:effectRef idx="2">
+            <a:schemeClr val="accent1"/>
+          </a:effectRef>
+          <a:fontRef idx="minor">
+            <a:schemeClr val="lt1"/>
+          </a:fontRef>
+        </p:style>
+        <p:txBody>
+          <a:bodyPr wrap="square" lIns="36000" tIns="0" rIns="36000" bIns="0" rtlCol="0" anchor="ctr"/>
+          <a:lstStyle/>
+          <a:p>
+            <a:pPr algn="ctr"/>
+            <a:r>
+              <a:rPr sz="1300" b="1">
+                <a:solidFill>
+                  <a:srgbClr val="FFFFFF"/>
+                </a:solidFill>
+                <a:latin typeface="メイリオ"/>
+                <a:ea typeface="メイリオ"/>
+                <a:cs typeface="メイリオ"/>
+              </a:rPr>
+              <a:t>月額 3万円〜</a:t>
+            </a:r>
+          </a:p>
+        </p:txBody>
+      </p:sp>
+      <p:sp>
+        <p:nvSpPr>
+          <p:cNvPr id="11" name="TextBox 10"/>
+          <p:cNvSpPr txBox="1"/>
+          <p:nvPr/>
+        </p:nvSpPr>
+        <p:spPr>
+          <a:xfrm>
+            <a:off x="3960000" y="4411800"/>
+            <a:ext cx="5508000" cy="324000"/>
+          </a:xfrm>
+          <a:prstGeom prst="rect">
+            <a:avLst/>
+          </a:prstGeom>
+          <a:noFill/>
+        </p:spPr>
+        <p:txBody>
+          <a:bodyPr wrap="square" lIns="0" tIns="21600" rIns="50400" bIns="21600" anchor="ctr">
+            <a:spAutoFit/>
+          </a:bodyPr>
+          <a:lstStyle/>
+          <a:p>
+            <a:pPr algn="l"/>
+            <a:r>
+              <a:rPr sz="1000">
+                <a:solidFill>
+                  <a:srgbClr val="7F7F7F"/>
+                </a:solidFill>
+                <a:latin typeface="メイリオ"/>
+                <a:ea typeface="メイリオ"/>
+                <a:cs typeface="メイリオ"/>
+              </a:rPr>
+              <a:t>※APIツール（Lステップ等）と併用可／完了画面を増やす場合は追加費用</a:t>
+            </a:r>
+          </a:p>
+        </p:txBody>
+      </p:sp>
+      <p:sp>
+        <p:nvSpPr>
           <p:cNvPr id="12" name="Rounded Rectangle 11"/>
           <p:cNvSpPr/>
           <p:nvPr/>
         </p:nvSpPr>
         <p:spPr>
           <a:xfrm>
-            <a:off x="432000" y="4718700"/>
+            <a:off x="432000" y="5023800"/>
             <a:ext cx="9043200" cy="503999"/>
           </a:xfrm>
           <a:prstGeom prst="roundRect">

--- a/20260930_サンクスLINEのご提案（簡易版）ver1.2.pptx
+++ b/20260930_サンクスLINEのご提案（簡易版）ver1.2.pptx
@@ -7289,7 +7289,7 @@
         </p:nvSpPr>
         <p:spPr>
           <a:xfrm>
-            <a:off x="432000" y="2143800"/>
+            <a:off x="432000" y="2071801"/>
             <a:ext cx="864000" cy="864000"/>
           </a:xfrm>
           <a:prstGeom prst="roundRect">
@@ -7350,7 +7350,7 @@
         </p:nvSpPr>
         <p:spPr>
           <a:xfrm>
-            <a:off x="1404000" y="2143800"/>
+            <a:off x="1404000" y="2071801"/>
             <a:ext cx="8071200" cy="864000"/>
           </a:xfrm>
           <a:prstGeom prst="roundRect">
@@ -7432,7 +7432,7 @@
         </p:nvSpPr>
         <p:spPr>
           <a:xfrm>
-            <a:off x="432000" y="3223800"/>
+            <a:off x="432000" y="3151801"/>
             <a:ext cx="864000" cy="864000"/>
           </a:xfrm>
           <a:prstGeom prst="roundRect">
@@ -7493,7 +7493,7 @@
         </p:nvSpPr>
         <p:spPr>
           <a:xfrm>
-            <a:off x="1404000" y="3223800"/>
+            <a:off x="1404000" y="3151801"/>
             <a:ext cx="8071200" cy="864000"/>
           </a:xfrm>
           <a:prstGeom prst="roundRect">
@@ -7575,8 +7575,8 @@
         </p:nvSpPr>
         <p:spPr>
           <a:xfrm>
-            <a:off x="432000" y="4411800"/>
-            <a:ext cx="1655999" cy="324000"/>
+            <a:off x="432000" y="4339801"/>
+            <a:ext cx="2340000" cy="468000"/>
           </a:xfrm>
           <a:prstGeom prst="roundRect">
             <a:avLst>
@@ -7611,7 +7611,7 @@
           <a:p>
             <a:pPr algn="ctr"/>
             <a:r>
-              <a:rPr sz="1300" b="1">
+              <a:rPr sz="1600" b="1">
                 <a:solidFill>
                   <a:srgbClr val="FFFFFF"/>
                 </a:solidFill>
@@ -7632,8 +7632,8 @@
         </p:nvSpPr>
         <p:spPr>
           <a:xfrm>
-            <a:off x="2160000" y="4411800"/>
-            <a:ext cx="1655999" cy="324000"/>
+            <a:off x="2880000" y="4339801"/>
+            <a:ext cx="2340000" cy="468000"/>
           </a:xfrm>
           <a:prstGeom prst="roundRect">
             <a:avLst>
@@ -7668,7 +7668,7 @@
           <a:p>
             <a:pPr algn="ctr"/>
             <a:r>
-              <a:rPr sz="1300" b="1">
+              <a:rPr sz="1600" b="1">
                 <a:solidFill>
                   <a:srgbClr val="FFFFFF"/>
                 </a:solidFill>
@@ -7689,8 +7689,8 @@
         </p:nvSpPr>
         <p:spPr>
           <a:xfrm>
-            <a:off x="3960000" y="4411800"/>
-            <a:ext cx="5508000" cy="324000"/>
+            <a:off x="5364000" y="4339801"/>
+            <a:ext cx="4111200" cy="468000"/>
           </a:xfrm>
           <a:prstGeom prst="rect">
             <a:avLst/>
@@ -7713,7 +7713,21 @@
                 <a:ea typeface="メイリオ"/>
                 <a:cs typeface="メイリオ"/>
               </a:rPr>
-              <a:t>※APIツール（Lステップ等）と併用可／完了画面を増やす場合は追加費用</a:t>
+              <a:t>※APIツール（Lステップ等）と併用可</a:t>
+            </a:r>
+          </a:p>
+          <a:p>
+            <a:pPr algn="l"/>
+            <a:r>
+              <a:rPr sz="1000">
+                <a:solidFill>
+                  <a:srgbClr val="7F7F7F"/>
+                </a:solidFill>
+                <a:latin typeface="メイリオ"/>
+                <a:ea typeface="メイリオ"/>
+                <a:cs typeface="メイリオ"/>
+              </a:rPr>
+              <a:t>※完了画面を増やす場合は追加費用</a:t>
             </a:r>
           </a:p>
         </p:txBody>
@@ -7726,7 +7740,7 @@
         </p:nvSpPr>
         <p:spPr>
           <a:xfrm>
-            <a:off x="432000" y="5023800"/>
+            <a:off x="432000" y="5095801"/>
             <a:ext cx="9043200" cy="503999"/>
           </a:xfrm>
           <a:prstGeom prst="roundRect">

--- a/20260930_サンクスLINEのご提案（簡易版）ver1.2.pptx
+++ b/20260930_サンクスLINEのご提案（簡易版）ver1.2.pptx
@@ -7289,7 +7289,7 @@
         </p:nvSpPr>
         <p:spPr>
           <a:xfrm>
-            <a:off x="432000" y="2071801"/>
+            <a:off x="432000" y="2017801"/>
             <a:ext cx="864000" cy="864000"/>
           </a:xfrm>
           <a:prstGeom prst="roundRect">
@@ -7350,7 +7350,7 @@
         </p:nvSpPr>
         <p:spPr>
           <a:xfrm>
-            <a:off x="1404000" y="2071801"/>
+            <a:off x="1404000" y="2017801"/>
             <a:ext cx="8071200" cy="864000"/>
           </a:xfrm>
           <a:prstGeom prst="roundRect">
@@ -7432,7 +7432,7 @@
         </p:nvSpPr>
         <p:spPr>
           <a:xfrm>
-            <a:off x="432000" y="3151801"/>
+            <a:off x="432000" y="3097801"/>
             <a:ext cx="864000" cy="864000"/>
           </a:xfrm>
           <a:prstGeom prst="roundRect">
@@ -7493,7 +7493,7 @@
         </p:nvSpPr>
         <p:spPr>
           <a:xfrm>
-            <a:off x="1404000" y="3151801"/>
+            <a:off x="1404000" y="3097801"/>
             <a:ext cx="8071200" cy="864000"/>
           </a:xfrm>
           <a:prstGeom prst="roundRect">
@@ -7575,7 +7575,7 @@
         </p:nvSpPr>
         <p:spPr>
           <a:xfrm>
-            <a:off x="432000" y="4339801"/>
+            <a:off x="2559600" y="4285801"/>
             <a:ext cx="2340000" cy="468000"/>
           </a:xfrm>
           <a:prstGeom prst="roundRect">
@@ -7632,7 +7632,7 @@
         </p:nvSpPr>
         <p:spPr>
           <a:xfrm>
-            <a:off x="2880000" y="4339801"/>
+            <a:off x="5007600" y="4285801"/>
             <a:ext cx="2340000" cy="468000"/>
           </a:xfrm>
           <a:prstGeom prst="roundRect">
@@ -7689,8 +7689,8 @@
         </p:nvSpPr>
         <p:spPr>
           <a:xfrm>
-            <a:off x="5364000" y="4339801"/>
-            <a:ext cx="4111200" cy="468000"/>
+            <a:off x="432000" y="4789800"/>
+            <a:ext cx="9043200" cy="251999"/>
           </a:xfrm>
           <a:prstGeom prst="rect">
             <a:avLst/>
@@ -7703,7 +7703,7 @@
           </a:bodyPr>
           <a:lstStyle/>
           <a:p>
-            <a:pPr algn="l"/>
+            <a:pPr algn="ctr"/>
             <a:r>
               <a:rPr sz="1000">
                 <a:solidFill>
@@ -7713,21 +7713,7 @@
                 <a:ea typeface="メイリオ"/>
                 <a:cs typeface="メイリオ"/>
               </a:rPr>
-              <a:t>※APIツール（Lステップ等）と併用可</a:t>
-            </a:r>
-          </a:p>
-          <a:p>
-            <a:pPr algn="l"/>
-            <a:r>
-              <a:rPr sz="1000">
-                <a:solidFill>
-                  <a:srgbClr val="7F7F7F"/>
-                </a:solidFill>
-                <a:latin typeface="メイリオ"/>
-                <a:ea typeface="メイリオ"/>
-                <a:cs typeface="メイリオ"/>
-              </a:rPr>
-              <a:t>※完了画面を増やす場合は追加費用</a:t>
+              <a:t>※APIツール（Lステップ等）と併用可／完了画面を増やす場合は追加費用</a:t>
             </a:r>
           </a:p>
         </p:txBody>
@@ -7740,7 +7726,7 @@
         </p:nvSpPr>
         <p:spPr>
           <a:xfrm>
-            <a:off x="432000" y="5095801"/>
+            <a:off x="432000" y="5149801"/>
             <a:ext cx="9043200" cy="503999"/>
           </a:xfrm>
           <a:prstGeom prst="roundRect">

--- a/20260930_サンクスLINEのご提案（簡易版）ver1.2.pptx
+++ b/20260930_サンクスLINEのご提案（簡易版）ver1.2.pptx
@@ -5040,8 +5040,8 @@
         </p:nvSpPr>
         <p:spPr>
           <a:xfrm>
-            <a:off x="432000" y="2215800"/>
-            <a:ext cx="2951999" cy="503999"/>
+            <a:off x="974592" y="2215800"/>
+            <a:ext cx="2597759" cy="503999"/>
           </a:xfrm>
           <a:prstGeom prst="roundRect">
             <a:avLst>
@@ -5101,7 +5101,7 @@
         </p:nvSpPr>
         <p:spPr>
           <a:xfrm>
-            <a:off x="1692000" y="2773801"/>
+            <a:off x="2057472" y="2773801"/>
             <a:ext cx="432000" cy="251999"/>
           </a:xfrm>
           <a:prstGeom prst="downArrow">
@@ -5146,8 +5146,8 @@
         </p:nvSpPr>
         <p:spPr>
           <a:xfrm>
-            <a:off x="432000" y="3079801"/>
-            <a:ext cx="2951999" cy="648000"/>
+            <a:off x="974592" y="3079801"/>
+            <a:ext cx="2597759" cy="648000"/>
           </a:xfrm>
           <a:prstGeom prst="roundRect">
             <a:avLst>
@@ -5209,7 +5209,7 @@
         </p:nvSpPr>
         <p:spPr>
           <a:xfrm>
-            <a:off x="1692000" y="3781800"/>
+            <a:off x="2057472" y="3781800"/>
             <a:ext cx="432000" cy="251999"/>
           </a:xfrm>
           <a:prstGeom prst="downArrow">
@@ -5254,8 +5254,8 @@
         </p:nvSpPr>
         <p:spPr>
           <a:xfrm>
-            <a:off x="432000" y="4087801"/>
-            <a:ext cx="2951999" cy="503999"/>
+            <a:off x="974592" y="4087801"/>
+            <a:ext cx="2597759" cy="503999"/>
           </a:xfrm>
           <a:prstGeom prst="roundRect">
             <a:avLst>
@@ -5315,8 +5315,8 @@
         </p:nvSpPr>
         <p:spPr>
           <a:xfrm>
-            <a:off x="3477599" y="2215800"/>
-            <a:ext cx="2951999" cy="503999"/>
+            <a:off x="3654719" y="2215800"/>
+            <a:ext cx="2597759" cy="503999"/>
           </a:xfrm>
           <a:prstGeom prst="roundRect">
             <a:avLst>
@@ -5421,8 +5421,8 @@
         </p:nvSpPr>
         <p:spPr>
           <a:xfrm>
-            <a:off x="3477599" y="3079801"/>
-            <a:ext cx="2951999" cy="648000"/>
+            <a:off x="3654719" y="3079801"/>
+            <a:ext cx="2597759" cy="648000"/>
           </a:xfrm>
           <a:prstGeom prst="roundRect">
             <a:avLst>
@@ -5529,8 +5529,8 @@
         </p:nvSpPr>
         <p:spPr>
           <a:xfrm>
-            <a:off x="3477599" y="4087801"/>
-            <a:ext cx="2951999" cy="503999"/>
+            <a:off x="3654719" y="4087801"/>
+            <a:ext cx="2597759" cy="503999"/>
           </a:xfrm>
           <a:prstGeom prst="roundRect">
             <a:avLst>
@@ -5590,8 +5590,8 @@
         </p:nvSpPr>
         <p:spPr>
           <a:xfrm>
-            <a:off x="6523199" y="2215800"/>
-            <a:ext cx="2951999" cy="503999"/>
+            <a:off x="6334847" y="2215800"/>
+            <a:ext cx="2597759" cy="503999"/>
           </a:xfrm>
           <a:prstGeom prst="roundRect">
             <a:avLst>
@@ -5651,7 +5651,7 @@
         </p:nvSpPr>
         <p:spPr>
           <a:xfrm>
-            <a:off x="7783199" y="2773801"/>
+            <a:off x="7417727" y="2773801"/>
             <a:ext cx="432000" cy="251999"/>
           </a:xfrm>
           <a:prstGeom prst="downArrow">
@@ -5696,8 +5696,8 @@
         </p:nvSpPr>
         <p:spPr>
           <a:xfrm>
-            <a:off x="6523199" y="3079801"/>
-            <a:ext cx="2951999" cy="648000"/>
+            <a:off x="6334847" y="3079801"/>
+            <a:ext cx="2597759" cy="648000"/>
           </a:xfrm>
           <a:prstGeom prst="roundRect">
             <a:avLst>
@@ -5759,7 +5759,7 @@
         </p:nvSpPr>
         <p:spPr>
           <a:xfrm>
-            <a:off x="7783199" y="3781800"/>
+            <a:off x="7417727" y="3781800"/>
             <a:ext cx="432000" cy="251999"/>
           </a:xfrm>
           <a:prstGeom prst="downArrow">
@@ -5804,8 +5804,8 @@
         </p:nvSpPr>
         <p:spPr>
           <a:xfrm>
-            <a:off x="6523199" y="4087801"/>
-            <a:ext cx="2951999" cy="503999"/>
+            <a:off x="6334847" y="4087801"/>
+            <a:ext cx="2597759" cy="503999"/>
           </a:xfrm>
           <a:prstGeom prst="roundRect">
             <a:avLst>
@@ -5906,8 +5906,8 @@
         </p:nvSpPr>
         <p:spPr>
           <a:xfrm>
-            <a:off x="432000" y="4951801"/>
-            <a:ext cx="9043200" cy="503999"/>
+            <a:off x="974592" y="4951801"/>
+            <a:ext cx="7958016" cy="503999"/>
           </a:xfrm>
           <a:prstGeom prst="roundRect">
             <a:avLst>
@@ -6129,8 +6129,8 @@
         </p:nvSpPr>
         <p:spPr>
           <a:xfrm>
-            <a:off x="1584000" y="2287800"/>
-            <a:ext cx="3204000" cy="270000"/>
+            <a:off x="1988352" y="2287800"/>
+            <a:ext cx="2459520" cy="270000"/>
           </a:xfrm>
           <a:prstGeom prst="roundRect">
             <a:avLst>
@@ -6186,8 +6186,8 @@
         </p:nvSpPr>
         <p:spPr>
           <a:xfrm>
-            <a:off x="4896000" y="2287800"/>
-            <a:ext cx="4579200" cy="270000"/>
+            <a:off x="4542912" y="2287800"/>
+            <a:ext cx="4389696" cy="270000"/>
           </a:xfrm>
           <a:prstGeom prst="roundRect">
             <a:avLst>
@@ -6243,8 +6243,8 @@
         </p:nvSpPr>
         <p:spPr>
           <a:xfrm>
-            <a:off x="432000" y="2683800"/>
-            <a:ext cx="1044000" cy="864000"/>
+            <a:off x="974592" y="2683800"/>
+            <a:ext cx="918720" cy="864000"/>
           </a:xfrm>
           <a:prstGeom prst="roundRect">
             <a:avLst>
@@ -6304,8 +6304,8 @@
         </p:nvSpPr>
         <p:spPr>
           <a:xfrm>
-            <a:off x="1584000" y="2683800"/>
-            <a:ext cx="3204000" cy="864000"/>
+            <a:off x="1988352" y="2683800"/>
+            <a:ext cx="2459520" cy="864000"/>
           </a:xfrm>
           <a:prstGeom prst="roundRect">
             <a:avLst>
@@ -6385,7 +6385,7 @@
         </p:nvSpPr>
         <p:spPr>
           <a:xfrm>
-            <a:off x="4860000" y="2953800"/>
+            <a:off x="4493952" y="2953800"/>
             <a:ext cx="288000" cy="324000"/>
           </a:xfrm>
           <a:prstGeom prst="rightArrow">
@@ -6430,8 +6430,8 @@
         </p:nvSpPr>
         <p:spPr>
           <a:xfrm>
-            <a:off x="5220000" y="2683800"/>
-            <a:ext cx="1944000" cy="864000"/>
+            <a:off x="4828032" y="2683800"/>
+            <a:ext cx="1710720" cy="864000"/>
           </a:xfrm>
           <a:prstGeom prst="roundRect">
             <a:avLst>
@@ -6494,7 +6494,7 @@
         </p:nvSpPr>
         <p:spPr>
           <a:xfrm>
-            <a:off x="7236000" y="2953800"/>
+            <a:off x="6584832" y="2953800"/>
             <a:ext cx="288000" cy="324000"/>
           </a:xfrm>
           <a:prstGeom prst="rightArrow">
@@ -6539,8 +6539,8 @@
         </p:nvSpPr>
         <p:spPr>
           <a:xfrm>
-            <a:off x="7596000" y="2683800"/>
-            <a:ext cx="1879200" cy="864000"/>
+            <a:off x="6918912" y="2683800"/>
+            <a:ext cx="2013696" cy="864000"/>
           </a:xfrm>
           <a:prstGeom prst="roundRect">
             <a:avLst>
@@ -6618,8 +6618,8 @@
         </p:nvSpPr>
         <p:spPr>
           <a:xfrm>
-            <a:off x="432000" y="3727800"/>
-            <a:ext cx="1044000" cy="864000"/>
+            <a:off x="974592" y="3727800"/>
+            <a:ext cx="918720" cy="864000"/>
           </a:xfrm>
           <a:prstGeom prst="roundRect">
             <a:avLst>
@@ -6697,8 +6697,8 @@
         </p:nvSpPr>
         <p:spPr>
           <a:xfrm>
-            <a:off x="1584000" y="3727800"/>
-            <a:ext cx="3204000" cy="864000"/>
+            <a:off x="1988352" y="3727800"/>
+            <a:ext cx="2459520" cy="864000"/>
           </a:xfrm>
           <a:prstGeom prst="roundRect">
             <a:avLst>
@@ -6778,7 +6778,7 @@
         </p:nvSpPr>
         <p:spPr>
           <a:xfrm>
-            <a:off x="4860000" y="3997800"/>
+            <a:off x="4493952" y="3997800"/>
             <a:ext cx="288000" cy="324000"/>
           </a:xfrm>
           <a:prstGeom prst="rightArrow">
@@ -6823,8 +6823,8 @@
         </p:nvSpPr>
         <p:spPr>
           <a:xfrm>
-            <a:off x="5220000" y="3727800"/>
-            <a:ext cx="1944000" cy="864000"/>
+            <a:off x="4828032" y="3727800"/>
+            <a:ext cx="1710720" cy="864000"/>
           </a:xfrm>
           <a:prstGeom prst="roundRect">
             <a:avLst>
@@ -6886,7 +6886,7 @@
         </p:nvSpPr>
         <p:spPr>
           <a:xfrm>
-            <a:off x="7236000" y="3997800"/>
+            <a:off x="6584832" y="3997800"/>
             <a:ext cx="288000" cy="324000"/>
           </a:xfrm>
           <a:prstGeom prst="rightArrow">
@@ -6931,8 +6931,8 @@
         </p:nvSpPr>
         <p:spPr>
           <a:xfrm>
-            <a:off x="7596000" y="3727800"/>
-            <a:ext cx="1879200" cy="864000"/>
+            <a:off x="6918912" y="3727800"/>
+            <a:ext cx="2013696" cy="864000"/>
           </a:xfrm>
           <a:prstGeom prst="roundRect">
             <a:avLst>
@@ -7010,8 +7010,8 @@
         </p:nvSpPr>
         <p:spPr>
           <a:xfrm>
-            <a:off x="432000" y="4879800"/>
-            <a:ext cx="9043200" cy="503999"/>
+            <a:off x="974592" y="4879800"/>
+            <a:ext cx="7958016" cy="503999"/>
           </a:xfrm>
           <a:prstGeom prst="roundRect">
             <a:avLst>
@@ -7289,8 +7289,8 @@
         </p:nvSpPr>
         <p:spPr>
           <a:xfrm>
-            <a:off x="432000" y="2017801"/>
-            <a:ext cx="864000" cy="864000"/>
+            <a:off x="974592" y="2017801"/>
+            <a:ext cx="760320" cy="864000"/>
           </a:xfrm>
           <a:prstGeom prst="roundRect">
             <a:avLst>
@@ -7350,8 +7350,8 @@
         </p:nvSpPr>
         <p:spPr>
           <a:xfrm>
-            <a:off x="1404000" y="2017801"/>
-            <a:ext cx="8071200" cy="864000"/>
+            <a:off x="1829952" y="2017801"/>
+            <a:ext cx="7102656" cy="864000"/>
           </a:xfrm>
           <a:prstGeom prst="roundRect">
             <a:avLst>
@@ -7432,8 +7432,8 @@
         </p:nvSpPr>
         <p:spPr>
           <a:xfrm>
-            <a:off x="432000" y="3097801"/>
-            <a:ext cx="864000" cy="864000"/>
+            <a:off x="974592" y="3097801"/>
+            <a:ext cx="760320" cy="864000"/>
           </a:xfrm>
           <a:prstGeom prst="roundRect">
             <a:avLst>
@@ -7493,8 +7493,8 @@
         </p:nvSpPr>
         <p:spPr>
           <a:xfrm>
-            <a:off x="1404000" y="3097801"/>
-            <a:ext cx="8071200" cy="864000"/>
+            <a:off x="1829952" y="3097801"/>
+            <a:ext cx="7102656" cy="864000"/>
           </a:xfrm>
           <a:prstGeom prst="roundRect">
             <a:avLst>
@@ -7575,8 +7575,8 @@
         </p:nvSpPr>
         <p:spPr>
           <a:xfrm>
-            <a:off x="2559600" y="4285801"/>
-            <a:ext cx="2340000" cy="468000"/>
+            <a:off x="2846880" y="4285801"/>
+            <a:ext cx="2059200" cy="468000"/>
           </a:xfrm>
           <a:prstGeom prst="roundRect">
             <a:avLst>
@@ -7632,8 +7632,8 @@
         </p:nvSpPr>
         <p:spPr>
           <a:xfrm>
-            <a:off x="5007600" y="4285801"/>
-            <a:ext cx="2340000" cy="468000"/>
+            <a:off x="5001120" y="4285801"/>
+            <a:ext cx="2059200" cy="468000"/>
           </a:xfrm>
           <a:prstGeom prst="roundRect">
             <a:avLst>
@@ -7689,8 +7689,8 @@
         </p:nvSpPr>
         <p:spPr>
           <a:xfrm>
-            <a:off x="432000" y="4789800"/>
-            <a:ext cx="9043200" cy="251999"/>
+            <a:off x="974592" y="4789800"/>
+            <a:ext cx="7958016" cy="251999"/>
           </a:xfrm>
           <a:prstGeom prst="rect">
             <a:avLst/>
@@ -7726,8 +7726,8 @@
         </p:nvSpPr>
         <p:spPr>
           <a:xfrm>
-            <a:off x="432000" y="5149801"/>
-            <a:ext cx="9043200" cy="503999"/>
+            <a:off x="974592" y="5149801"/>
+            <a:ext cx="7958016" cy="503999"/>
           </a:xfrm>
           <a:prstGeom prst="roundRect">
             <a:avLst>
